--- a/media/resources/files/EkiOrunduuOnduktar_Boluu_3tuTutashtyr.pptx
+++ b/media/resources/files/EkiOrunduuOnduktar_Boluu_3tuTutashtyr.pptx
@@ -21106,7 +21106,7 @@
             </a:pPr>
             <a:r>
               <a:rPr lang="ru-RU" dirty="0"/>
-              <a:t>Турдуу пикирлер учун ыраазычылык билдиребиз.</a:t>
+              <a:t>Түрдүү пикирлер үчүн ыраазычылык билдиребиз.</a:t>
             </a:r>
           </a:p>
           <a:p>

--- a/media/resources/files/EkiOrunduuOnduktar_Boluu_3tuTutashtyr.pptx
+++ b/media/resources/files/EkiOrunduuOnduktar_Boluu_3tuTutashtyr.pptx
@@ -7385,7 +7385,7 @@
                 <a:ea typeface="+mn-ea"/>
                 <a:cs typeface="+mn-cs"/>
               </a:rPr>
-              <a:t>Ошол команда үчүн квадратты талап кылуу үчүн жооп кутучасынын тиешелүү көлөкө тарабын чыкылдатыңыз/тийиңиз.</a:t>
+              <a:t>Ошол команданын квадратын ээлөө үчүн жооп кутучасынын боёлгон бөлүгүн басыңыз.</a:t>
             </a:r>
           </a:p>
           <a:p>
@@ -9529,7 +9529,7 @@
                           <a:latin typeface="Arial" panose="020B0604020202020204" pitchFamily="34" charset="0"/>
                           <a:cs typeface="Arial" panose="020B0604020202020204" pitchFamily="34" charset="0"/>
                         </a:rPr>
-                        <a:t>12 ÷ 0.6</a:t>
+                        <a:t>12 ÷ 0,6</a:t>
                       </a:r>
                     </a:p>
                   </a:txBody>
@@ -9586,7 +9586,7 @@
                           <a:latin typeface="Arial" panose="020B0604020202020204" pitchFamily="34" charset="0"/>
                           <a:cs typeface="Arial" panose="020B0604020202020204" pitchFamily="34" charset="0"/>
                         </a:rPr>
-                        <a:t>0.32 ÷ 0.02</a:t>
+                        <a:t>0,32 ÷ 0,02</a:t>
                       </a:r>
                     </a:p>
                   </a:txBody>
@@ -9650,7 +9650,7 @@
                           <a:latin typeface="Arial" panose="020B0604020202020204" pitchFamily="34" charset="0"/>
                           <a:cs typeface="Arial" panose="020B0604020202020204" pitchFamily="34" charset="0"/>
                         </a:rPr>
-                        <a:t>1.36 ÷ 0.04</a:t>
+                        <a:t>1,36 ÷ 0,04</a:t>
                       </a:r>
                     </a:p>
                   </a:txBody>
@@ -9707,7 +9707,7 @@
                           <a:latin typeface="Arial" panose="020B0604020202020204" pitchFamily="34" charset="0"/>
                           <a:cs typeface="Arial" panose="020B0604020202020204" pitchFamily="34" charset="0"/>
                         </a:rPr>
-                        <a:t>11.5 ÷ 0.5</a:t>
+                        <a:t>11,5 ÷ 0,5</a:t>
                       </a:r>
                     </a:p>
                   </a:txBody>
@@ -9771,7 +9771,7 @@
                           <a:latin typeface="Arial" panose="020B0604020202020204" pitchFamily="34" charset="0"/>
                           <a:cs typeface="Arial" panose="020B0604020202020204" pitchFamily="34" charset="0"/>
                         </a:rPr>
-                        <a:t>5.1 ÷ 0.3</a:t>
+                        <a:t>5,1 ÷ 0,3</a:t>
                       </a:r>
                     </a:p>
                   </a:txBody>
@@ -9828,7 +9828,7 @@
                           <a:latin typeface="Arial" panose="020B0604020202020204" pitchFamily="34" charset="0"/>
                           <a:cs typeface="Arial" panose="020B0604020202020204" pitchFamily="34" charset="0"/>
                         </a:rPr>
-                        <a:t>2.56 ÷ 0.08</a:t>
+                        <a:t>2,56 ÷ 0,08</a:t>
                       </a:r>
                     </a:p>
                   </a:txBody>
@@ -9892,7 +9892,7 @@
                           <a:latin typeface="Arial" panose="020B0604020202020204" pitchFamily="34" charset="0"/>
                           <a:cs typeface="Arial" panose="020B0604020202020204" pitchFamily="34" charset="0"/>
                         </a:rPr>
-                        <a:t>14.4 ÷ 0.8</a:t>
+                        <a:t>14,4 ÷ 0,8</a:t>
                       </a:r>
                     </a:p>
                   </a:txBody>
@@ -9949,7 +9949,7 @@
                           <a:latin typeface="Arial" panose="020B0604020202020204" pitchFamily="34" charset="0"/>
                           <a:cs typeface="Arial" panose="020B0604020202020204" pitchFamily="34" charset="0"/>
                         </a:rPr>
-                        <a:t>1.32 ÷ 0.06</a:t>
+                        <a:t>1,32 ÷ 0,06</a:t>
                       </a:r>
                     </a:p>
                   </a:txBody>
@@ -10013,7 +10013,7 @@
                           <a:latin typeface="Arial" panose="020B0604020202020204" pitchFamily="34" charset="0"/>
                           <a:cs typeface="Arial" panose="020B0604020202020204" pitchFamily="34" charset="0"/>
                         </a:rPr>
-                        <a:t>1.08 ÷ 0.04</a:t>
+                        <a:t>1,08 ÷ 0,04</a:t>
                       </a:r>
                     </a:p>
                   </a:txBody>
@@ -10070,7 +10070,7 @@
                           <a:latin typeface="Arial" panose="020B0604020202020204" pitchFamily="34" charset="0"/>
                           <a:cs typeface="Arial" panose="020B0604020202020204" pitchFamily="34" charset="0"/>
                         </a:rPr>
-                        <a:t>8.4 ÷ 0.4</a:t>
+                        <a:t>8,4 ÷ 0,4</a:t>
                       </a:r>
                     </a:p>
                   </a:txBody>
@@ -10134,7 +10134,7 @@
                           <a:latin typeface="Arial" panose="020B0604020202020204" pitchFamily="34" charset="0"/>
                           <a:cs typeface="Arial" panose="020B0604020202020204" pitchFamily="34" charset="0"/>
                         </a:rPr>
-                        <a:t>0.39 ÷ 0.03</a:t>
+                        <a:t>0,39 ÷ 0,03</a:t>
                       </a:r>
                     </a:p>
                   </a:txBody>
@@ -10191,7 +10191,7 @@
                           <a:latin typeface="Arial" panose="020B0604020202020204" pitchFamily="34" charset="0"/>
                           <a:cs typeface="Arial" panose="020B0604020202020204" pitchFamily="34" charset="0"/>
                         </a:rPr>
-                        <a:t>17.1 ÷ 0.9</a:t>
+                        <a:t>17,1 ÷ 0,9</a:t>
                       </a:r>
                     </a:p>
                   </a:txBody>
@@ -10255,7 +10255,7 @@
                           <a:latin typeface="Arial" panose="020B0604020202020204" pitchFamily="34" charset="0"/>
                           <a:cs typeface="Arial" panose="020B0604020202020204" pitchFamily="34" charset="0"/>
                         </a:rPr>
-                        <a:t>5.2 ÷ 0.2</a:t>
+                        <a:t>5,2 ÷ 0,2</a:t>
                       </a:r>
                     </a:p>
                   </a:txBody>
@@ -10312,7 +10312,7 @@
                           <a:latin typeface="Arial" panose="020B0604020202020204" pitchFamily="34" charset="0"/>
                           <a:cs typeface="Arial" panose="020B0604020202020204" pitchFamily="34" charset="0"/>
                         </a:rPr>
-                        <a:t>0.48 ÷ 0.02</a:t>
+                        <a:t>0,48 ÷ 0,02</a:t>
                       </a:r>
                     </a:p>
                   </a:txBody>
@@ -10376,7 +10376,7 @@
                           <a:latin typeface="Arial" panose="020B0604020202020204" pitchFamily="34" charset="0"/>
                           <a:cs typeface="Arial" panose="020B0604020202020204" pitchFamily="34" charset="0"/>
                         </a:rPr>
-                        <a:t>1 ÷ 0.04</a:t>
+                        <a:t>1 ÷ 0,04</a:t>
                       </a:r>
                     </a:p>
                   </a:txBody>
@@ -10433,7 +10433,7 @@
                           <a:latin typeface="Arial" panose="020B0604020202020204" pitchFamily="34" charset="0"/>
                           <a:cs typeface="Arial" panose="020B0604020202020204" pitchFamily="34" charset="0"/>
                         </a:rPr>
-                        <a:t>23.8 ÷ 0.7</a:t>
+                        <a:t>23,8 ÷ 0,7</a:t>
                       </a:r>
                     </a:p>
                   </a:txBody>
